--- a/IEP/t2-lesson4-bellwork-IEP-ANSWER-KEY.pptx
+++ b/IEP/t2-lesson4-bellwork-IEP-ANSWER-KEY.pptx
@@ -987,6 +987,40 @@
           </a:p>
         </p:txBody>
       </p:sp>
+      <p:sp>
+        <p:nvSpPr>
+          <p:cNvPr id="8" name="Slide Number 8"/>
+          <p:cNvSpPr txBox="1"/>
+          <p:nvPr/>
+        </p:nvSpPr>
+        <p:spPr>
+          <a:xfrm>
+            <a:off x="11277295" y="6611112"/>
+            <a:ext cx="685800" cy="201168"/>
+          </a:xfrm>
+          <a:prstGeom prst="rect">
+            <a:avLst/>
+          </a:prstGeom>
+          <a:noFill/>
+        </p:spPr>
+        <p:txBody>
+          <a:bodyPr wrap="none" lIns="0" tIns="0" rIns="0" bIns="0" anchor="b">
+            <a:noAutofit/>
+          </a:bodyPr>
+          <a:lstStyle/>
+          <a:p>
+            <a:pPr algn="r"/>
+            <a:fld id="{5C1A6E0B-3B1F-4D5E-9C7A-2F4B8D6E1A90}" type="slidenum">
+              <a:rPr lang="en-US" sz="1200" dirty="0">
+                <a:solidFill>
+                  <a:srgbClr val="5F6272"/>
+                </a:solidFill>
+              </a:rPr>
+              <a:t>1</a:t>
+            </a:fld>
+          </a:p>
+        </p:txBody>
+      </p:sp>
     </p:spTree>
   </p:cSld>
   <p:clrMapOvr>
@@ -1620,6 +1654,40 @@
           </a:p>
         </p:txBody>
       </p:sp>
+      <p:sp>
+        <p:nvSpPr>
+          <p:cNvPr id="16" name="Slide Number 16"/>
+          <p:cNvSpPr txBox="1"/>
+          <p:nvPr/>
+        </p:nvSpPr>
+        <p:spPr>
+          <a:xfrm>
+            <a:off x="11277295" y="6611112"/>
+            <a:ext cx="685800" cy="201168"/>
+          </a:xfrm>
+          <a:prstGeom prst="rect">
+            <a:avLst/>
+          </a:prstGeom>
+          <a:noFill/>
+        </p:spPr>
+        <p:txBody>
+          <a:bodyPr wrap="none" lIns="0" tIns="0" rIns="0" bIns="0" anchor="b">
+            <a:noAutofit/>
+          </a:bodyPr>
+          <a:lstStyle/>
+          <a:p>
+            <a:pPr algn="r"/>
+            <a:fld id="{5C1A6E0B-3B1F-4D5E-9C7A-2F4B8D6E1A90}" type="slidenum">
+              <a:rPr lang="en-US" sz="1200" dirty="0">
+                <a:solidFill>
+                  <a:srgbClr val="5F6272"/>
+                </a:solidFill>
+              </a:rPr>
+              <a:t>2</a:t>
+            </a:fld>
+          </a:p>
+        </p:txBody>
+      </p:sp>
     </p:spTree>
   </p:cSld>
   <p:clrMapOvr>
@@ -2253,6 +2321,40 @@
           </a:p>
         </p:txBody>
       </p:sp>
+      <p:sp>
+        <p:nvSpPr>
+          <p:cNvPr id="16" name="Slide Number 16"/>
+          <p:cNvSpPr txBox="1"/>
+          <p:nvPr/>
+        </p:nvSpPr>
+        <p:spPr>
+          <a:xfrm>
+            <a:off x="11277295" y="6611112"/>
+            <a:ext cx="685800" cy="201168"/>
+          </a:xfrm>
+          <a:prstGeom prst="rect">
+            <a:avLst/>
+          </a:prstGeom>
+          <a:noFill/>
+        </p:spPr>
+        <p:txBody>
+          <a:bodyPr wrap="none" lIns="0" tIns="0" rIns="0" bIns="0" anchor="b">
+            <a:noAutofit/>
+          </a:bodyPr>
+          <a:lstStyle/>
+          <a:p>
+            <a:pPr algn="r"/>
+            <a:fld id="{5C1A6E0B-3B1F-4D5E-9C7A-2F4B8D6E1A90}" type="slidenum">
+              <a:rPr lang="en-US" sz="1200" dirty="0">
+                <a:solidFill>
+                  <a:srgbClr val="5F6272"/>
+                </a:solidFill>
+              </a:rPr>
+              <a:t>3</a:t>
+            </a:fld>
+          </a:p>
+        </p:txBody>
+      </p:sp>
     </p:spTree>
   </p:cSld>
   <p:clrMapOvr>
@@ -2886,6 +2988,40 @@
           </a:p>
         </p:txBody>
       </p:sp>
+      <p:sp>
+        <p:nvSpPr>
+          <p:cNvPr id="16" name="Slide Number 16"/>
+          <p:cNvSpPr txBox="1"/>
+          <p:nvPr/>
+        </p:nvSpPr>
+        <p:spPr>
+          <a:xfrm>
+            <a:off x="11277295" y="6611112"/>
+            <a:ext cx="685800" cy="201168"/>
+          </a:xfrm>
+          <a:prstGeom prst="rect">
+            <a:avLst/>
+          </a:prstGeom>
+          <a:noFill/>
+        </p:spPr>
+        <p:txBody>
+          <a:bodyPr wrap="none" lIns="0" tIns="0" rIns="0" bIns="0" anchor="b">
+            <a:noAutofit/>
+          </a:bodyPr>
+          <a:lstStyle/>
+          <a:p>
+            <a:pPr algn="r"/>
+            <a:fld id="{5C1A6E0B-3B1F-4D5E-9C7A-2F4B8D6E1A90}" type="slidenum">
+              <a:rPr lang="en-US" sz="1200" dirty="0">
+                <a:solidFill>
+                  <a:srgbClr val="5F6272"/>
+                </a:solidFill>
+              </a:rPr>
+              <a:t>4</a:t>
+            </a:fld>
+          </a:p>
+        </p:txBody>
+      </p:sp>
     </p:spTree>
   </p:cSld>
   <p:clrMapOvr>
@@ -3516,6 +3652,40 @@
               <a:t xml:space="preserve">Topic 2 Lesson 4 Bell Work · IEP Version · Answer Key (teacher copy)</a:t>
             </a:r>
             <a:endParaRPr lang="en-US" sz="1125" dirty="0"/>
+          </a:p>
+        </p:txBody>
+      </p:sp>
+      <p:sp>
+        <p:nvSpPr>
+          <p:cNvPr id="16" name="Slide Number 16"/>
+          <p:cNvSpPr txBox="1"/>
+          <p:nvPr/>
+        </p:nvSpPr>
+        <p:spPr>
+          <a:xfrm>
+            <a:off x="11277295" y="6611112"/>
+            <a:ext cx="685800" cy="201168"/>
+          </a:xfrm>
+          <a:prstGeom prst="rect">
+            <a:avLst/>
+          </a:prstGeom>
+          <a:noFill/>
+        </p:spPr>
+        <p:txBody>
+          <a:bodyPr wrap="none" lIns="0" tIns="0" rIns="0" bIns="0" anchor="b">
+            <a:noAutofit/>
+          </a:bodyPr>
+          <a:lstStyle/>
+          <a:p>
+            <a:pPr algn="r"/>
+            <a:fld id="{5C1A6E0B-3B1F-4D5E-9C7A-2F4B8D6E1A90}" type="slidenum">
+              <a:rPr lang="en-US" sz="1200" dirty="0">
+                <a:solidFill>
+                  <a:srgbClr val="5F6272"/>
+                </a:solidFill>
+              </a:rPr>
+              <a:t>5</a:t>
+            </a:fld>
           </a:p>
         </p:txBody>
       </p:sp>

--- a/IEP/t2-lesson4-bellwork-IEP-ANSWER-KEY.pptx
+++ b/IEP/t2-lesson4-bellwork-IEP-ANSWER-KEY.pptx
@@ -1255,7 +1255,7 @@
         <p:spPr>
           <a:xfrm>
             <a:off x="685800" y="1707642"/>
-            <a:ext cx="2164019" cy="1024128"/>
+            <a:ext cx="2164019" cy="1572768"/>
           </a:xfrm>
           <a:prstGeom prst="rect">
             <a:avLst/>
@@ -1309,7 +1309,7 @@
         <p:spPr>
           <a:xfrm>
             <a:off x="2849819" y="1707642"/>
-            <a:ext cx="4328038" cy="1024128"/>
+            <a:ext cx="4328038" cy="1572768"/>
           </a:xfrm>
           <a:prstGeom prst="rect">
             <a:avLst/>
@@ -1353,7 +1353,7 @@
         <p:spPr>
           <a:xfrm>
             <a:off x="7177857" y="1707642"/>
-            <a:ext cx="4328038" cy="1024128"/>
+            <a:ext cx="4328038" cy="1572768"/>
           </a:xfrm>
           <a:prstGeom prst="rect">
             <a:avLst/>
@@ -1401,7 +1401,7 @@
                 <a:latin typeface="Segoe UI"/>
                 <a:cs typeface="Segoe UI"/>
               </a:rPr>
-              <a:t xml:space="preserve">Slope = (4 − (−6)) ÷ (0 − (−2.5)) = 10 ÷ 2.5 = 4.</a:t>
+              <a:t xml:space="preserve">1. Subtract the y-values: 4 − (−6) = 4 + 6 = 10. 2. Subtract the x-values: 0 − (−2.5) = 2.5. 3. Divide: 10 ÷ 2.5 = 4.</a:t>
             </a:r>
             <a:endParaRPr lang="en-US" sz="1800" dirty="0"/>
           </a:p>
@@ -1415,7 +1415,7 @@
         </p:nvCxnSpPr>
         <p:spPr>
           <a:xfrm>
-            <a:off x="685800" y="2731770"/>
+            <a:off x="685800" y="3280410"/>
             <a:ext cx="10820095" cy="0"/>
           </a:xfrm>
           <a:prstGeom prst="line">
@@ -1436,8 +1436,8 @@
         </p:nvSpPr>
         <p:spPr>
           <a:xfrm>
-            <a:off x="685800" y="2731770"/>
-            <a:ext cx="2164019" cy="749808"/>
+            <a:off x="685800" y="3280410"/>
+            <a:ext cx="2164019" cy="1298448"/>
           </a:xfrm>
           <a:prstGeom prst="rect">
             <a:avLst/>
@@ -1490,8 +1490,8 @@
         </p:nvSpPr>
         <p:spPr>
           <a:xfrm>
-            <a:off x="2849819" y="2731770"/>
-            <a:ext cx="4328038" cy="749808"/>
+            <a:off x="2849819" y="3280410"/>
+            <a:ext cx="4328038" cy="1298448"/>
           </a:xfrm>
           <a:prstGeom prst="rect">
             <a:avLst/>
@@ -1534,8 +1534,8 @@
         </p:nvSpPr>
         <p:spPr>
           <a:xfrm>
-            <a:off x="7177857" y="2731770"/>
-            <a:ext cx="4328038" cy="749808"/>
+            <a:off x="7177857" y="3280410"/>
+            <a:ext cx="4328038" cy="1298448"/>
           </a:xfrm>
           <a:prstGeom prst="rect">
             <a:avLst/>
@@ -1583,7 +1583,7 @@
                 <a:latin typeface="Segoe UI"/>
                 <a:cs typeface="Segoe UI"/>
               </a:rPr>
-              <a:t xml:space="preserve">Parallel lines have equal slopes.</a:t>
+              <a:t xml:space="preserve">1. The slope of y = 4x − 3 is 4, the number with x. 2. A parallel line has the same slope: 4.</a:t>
             </a:r>
             <a:endParaRPr lang="en-US" sz="1800" dirty="0"/>
           </a:p>
@@ -1597,7 +1597,7 @@
         </p:nvCxnSpPr>
         <p:spPr>
           <a:xfrm>
-            <a:off x="685800" y="3481578"/>
+            <a:off x="685800" y="4578858"/>
             <a:ext cx="10820095" cy="0"/>
           </a:xfrm>
           <a:prstGeom prst="line">
@@ -1922,7 +1922,7 @@
         <p:spPr>
           <a:xfrm>
             <a:off x="685800" y="1707642"/>
-            <a:ext cx="2164019" cy="749808"/>
+            <a:ext cx="2164019" cy="1298448"/>
           </a:xfrm>
           <a:prstGeom prst="rect">
             <a:avLst/>
@@ -1976,7 +1976,7 @@
         <p:spPr>
           <a:xfrm>
             <a:off x="2849819" y="1707642"/>
-            <a:ext cx="4328038" cy="749808"/>
+            <a:ext cx="4328038" cy="1298448"/>
           </a:xfrm>
           <a:prstGeom prst="rect">
             <a:avLst/>
@@ -2020,7 +2020,7 @@
         <p:spPr>
           <a:xfrm>
             <a:off x="7177857" y="1707642"/>
-            <a:ext cx="4328038" cy="749808"/>
+            <a:ext cx="4328038" cy="1298448"/>
           </a:xfrm>
           <a:prstGeom prst="rect">
             <a:avLst/>
@@ -2068,7 +2068,7 @@
                 <a:latin typeface="Segoe UI"/>
                 <a:cs typeface="Segoe UI"/>
               </a:rPr>
-              <a:t xml:space="preserve">The negative reciprocal of 4 is −¼.</a:t>
+              <a:t xml:space="preserve">1. 4 = 4/1. Flip it: 1/4. 2. Change the sign: −¼. 3. Check: 4 · (−¼) = −1.</a:t>
             </a:r>
             <a:endParaRPr lang="en-US" sz="1800" dirty="0"/>
           </a:p>
@@ -2082,7 +2082,7 @@
         </p:nvCxnSpPr>
         <p:spPr>
           <a:xfrm>
-            <a:off x="685800" y="2457450"/>
+            <a:off x="685800" y="3006090"/>
             <a:ext cx="10820095" cy="0"/>
           </a:xfrm>
           <a:prstGeom prst="line">
@@ -2103,8 +2103,8 @@
         </p:nvSpPr>
         <p:spPr>
           <a:xfrm>
-            <a:off x="685800" y="2457450"/>
-            <a:ext cx="2164019" cy="1024128"/>
+            <a:off x="685800" y="3006090"/>
+            <a:ext cx="2164019" cy="1298448"/>
           </a:xfrm>
           <a:prstGeom prst="rect">
             <a:avLst/>
@@ -2157,8 +2157,8 @@
         </p:nvSpPr>
         <p:spPr>
           <a:xfrm>
-            <a:off x="2849819" y="2457450"/>
-            <a:ext cx="4328038" cy="1024128"/>
+            <a:off x="2849819" y="3006090"/>
+            <a:ext cx="4328038" cy="1298448"/>
           </a:xfrm>
           <a:prstGeom prst="rect">
             <a:avLst/>
@@ -2201,8 +2201,8 @@
         </p:nvSpPr>
         <p:spPr>
           <a:xfrm>
-            <a:off x="7177857" y="2457450"/>
-            <a:ext cx="4328038" cy="1024128"/>
+            <a:off x="7177857" y="3006090"/>
+            <a:ext cx="4328038" cy="1298448"/>
           </a:xfrm>
           <a:prstGeom prst="rect">
             <a:avLst/>
@@ -2250,7 +2250,7 @@
                 <a:latin typeface="Segoe UI"/>
                 <a:cs typeface="Segoe UI"/>
               </a:rPr>
-              <a:t xml:space="preserve">Equal numbers of each grade: y = x, slope 1.</a:t>
+              <a:t xml:space="preserve">1. 1 : 1 means 1 tenth-grader for every 1 ninth-grader. 2. 1 ÷ 1 = 1, so y = x and the slope is 1.</a:t>
             </a:r>
             <a:endParaRPr lang="en-US" sz="1800" dirty="0"/>
           </a:p>
@@ -2264,7 +2264,7 @@
         </p:nvCxnSpPr>
         <p:spPr>
           <a:xfrm>
-            <a:off x="685800" y="3481578"/>
+            <a:off x="685800" y="4304538"/>
             <a:ext cx="10820095" cy="0"/>
           </a:xfrm>
           <a:prstGeom prst="line">
@@ -2735,7 +2735,7 @@
                 <a:latin typeface="Segoe UI"/>
                 <a:cs typeface="Segoe UI"/>
               </a:rPr>
-              <a:t xml:space="preserve">15 · 3 = 45.</a:t>
+              <a:t xml:space="preserve">1. Rate: $15 per ton. Amount: 3 tons. 2. 15 · 3 = 45, so $45.</a:t>
             </a:r>
             <a:endParaRPr lang="en-US" sz="1800" dirty="0"/>
           </a:p>
@@ -2771,7 +2771,7 @@
         <p:spPr>
           <a:xfrm>
             <a:off x="685800" y="2731770"/>
-            <a:ext cx="2164019" cy="1024128"/>
+            <a:ext cx="2164019" cy="1298448"/>
           </a:xfrm>
           <a:prstGeom prst="rect">
             <a:avLst/>
@@ -2825,7 +2825,7 @@
         <p:spPr>
           <a:xfrm>
             <a:off x="2849819" y="2731770"/>
-            <a:ext cx="4328038" cy="1024128"/>
+            <a:ext cx="4328038" cy="1298448"/>
           </a:xfrm>
           <a:prstGeom prst="rect">
             <a:avLst/>
@@ -2869,7 +2869,7 @@
         <p:spPr>
           <a:xfrm>
             <a:off x="7177857" y="2731770"/>
-            <a:ext cx="4328038" cy="1024128"/>
+            <a:ext cx="4328038" cy="1298448"/>
           </a:xfrm>
           <a:prstGeom prst="rect">
             <a:avLst/>
@@ -2917,7 +2917,7 @@
                 <a:latin typeface="Segoe UI"/>
                 <a:cs typeface="Segoe UI"/>
               </a:rPr>
-              <a:t xml:space="preserve">Slope = 20 ÷ 1 = 20 dollars per ton.</a:t>
+              <a:t xml:space="preserve">1. Change in y: 20 − 0 = 20. Change in x: 1 − 0 = 1. 2. 20 ÷ 1 = 20, so $20 per ton.</a:t>
             </a:r>
             <a:endParaRPr lang="en-US" sz="1800" dirty="0"/>
           </a:p>
@@ -2931,7 +2931,7 @@
         </p:nvCxnSpPr>
         <p:spPr>
           <a:xfrm>
-            <a:off x="685800" y="3755898"/>
+            <a:off x="685800" y="4030218"/>
             <a:ext cx="10820095" cy="0"/>
           </a:xfrm>
           <a:prstGeom prst="line">
@@ -3256,7 +3256,7 @@
         <p:spPr>
           <a:xfrm>
             <a:off x="685800" y="1707642"/>
-            <a:ext cx="2164019" cy="1024128"/>
+            <a:ext cx="2164019" cy="1298448"/>
           </a:xfrm>
           <a:prstGeom prst="rect">
             <a:avLst/>
@@ -3310,7 +3310,7 @@
         <p:spPr>
           <a:xfrm>
             <a:off x="2849819" y="1707642"/>
-            <a:ext cx="4328038" cy="1024128"/>
+            <a:ext cx="4328038" cy="1298448"/>
           </a:xfrm>
           <a:prstGeom prst="rect">
             <a:avLst/>
@@ -3354,7 +3354,7 @@
         <p:spPr>
           <a:xfrm>
             <a:off x="7177857" y="1707642"/>
-            <a:ext cx="4328038" cy="1024128"/>
+            <a:ext cx="4328038" cy="1298448"/>
           </a:xfrm>
           <a:prstGeom prst="rect">
             <a:avLst/>
@@ -3402,7 +3402,7 @@
                 <a:latin typeface="Segoe UI"/>
                 <a:cs typeface="Segoe UI"/>
               </a:rPr>
-              <a:t xml:space="preserve">9/5 · 10 + 32 = 18 + 32 = 50, so 10°C is 50°F.</a:t>
+              <a:t xml:space="preserve">1. J(10) = 9/5 · 10 + 32. 2. Multiply: 9/5 · 10 = 90 ÷ 5 = 18. 3. Add: 18 + 32 = 50. 10°C is 50°F.</a:t>
             </a:r>
             <a:endParaRPr lang="en-US" sz="1800" dirty="0"/>
           </a:p>
@@ -3416,7 +3416,7 @@
         </p:nvCxnSpPr>
         <p:spPr>
           <a:xfrm>
-            <a:off x="685800" y="2731770"/>
+            <a:off x="685800" y="3006090"/>
             <a:ext cx="10820095" cy="0"/>
           </a:xfrm>
           <a:prstGeom prst="line">
@@ -3437,8 +3437,8 @@
         </p:nvSpPr>
         <p:spPr>
           <a:xfrm>
-            <a:off x="685800" y="2731770"/>
-            <a:ext cx="2164019" cy="1024128"/>
+            <a:off x="685800" y="3006090"/>
+            <a:ext cx="2164019" cy="1298448"/>
           </a:xfrm>
           <a:prstGeom prst="rect">
             <a:avLst/>
@@ -3491,8 +3491,8 @@
         </p:nvSpPr>
         <p:spPr>
           <a:xfrm>
-            <a:off x="2849819" y="2731770"/>
-            <a:ext cx="4328038" cy="1024128"/>
+            <a:off x="2849819" y="3006090"/>
+            <a:ext cx="4328038" cy="1298448"/>
           </a:xfrm>
           <a:prstGeom prst="rect">
             <a:avLst/>
@@ -3535,8 +3535,8 @@
         </p:nvSpPr>
         <p:spPr>
           <a:xfrm>
-            <a:off x="7177857" y="2731770"/>
-            <a:ext cx="4328038" cy="1024128"/>
+            <a:off x="7177857" y="3006090"/>
+            <a:ext cx="4328038" cy="1298448"/>
           </a:xfrm>
           <a:prstGeom prst="rect">
             <a:avLst/>
@@ -3584,7 +3584,7 @@
                 <a:latin typeface="Segoe UI"/>
                 <a:cs typeface="Segoe UI"/>
               </a:rPr>
-              <a:t xml:space="preserve">80 ÷ 4 = 20 dollars per month.</a:t>
+              <a:t xml:space="preserve">1. Change in money: 80 − 0 = 80 dollars. 2. Change in time: 4 months. 3. 80 ÷ 4 = 20, so $20 per month.</a:t>
             </a:r>
             <a:endParaRPr lang="en-US" sz="1800" dirty="0"/>
           </a:p>
@@ -3598,7 +3598,7 @@
         </p:nvCxnSpPr>
         <p:spPr>
           <a:xfrm>
-            <a:off x="685800" y="3755898"/>
+            <a:off x="685800" y="4304538"/>
             <a:ext cx="10820095" cy="0"/>
           </a:xfrm>
           <a:prstGeom prst="line">

--- a/IEP/t2-lesson4-bellwork-IEP-ANSWER-KEY.pptx
+++ b/IEP/t2-lesson4-bellwork-IEP-ANSWER-KEY.pptx
@@ -2104,7 +2104,7 @@
         <p:spPr>
           <a:xfrm>
             <a:off x="685800" y="3006090"/>
-            <a:ext cx="2164019" cy="1298448"/>
+            <a:ext cx="2164019" cy="1847088"/>
           </a:xfrm>
           <a:prstGeom prst="rect">
             <a:avLst/>
@@ -2143,7 +2143,7 @@
                 <a:latin typeface="Segoe UI"/>
                 <a:cs typeface="Segoe UI"/>
               </a:rPr>
-              <a:t xml:space="preserve"> · SE p. 320</a:t>
+              <a:t xml:space="preserve"> · SE p. 325</a:t>
             </a:r>
             <a:endParaRPr lang="en-US" sz="1800" dirty="0"/>
           </a:p>
@@ -2158,7 +2158,7 @@
         <p:spPr>
           <a:xfrm>
             <a:off x="2849819" y="3006090"/>
-            <a:ext cx="4328038" cy="1298448"/>
+            <a:ext cx="4328038" cy="1847088"/>
           </a:xfrm>
           <a:prstGeom prst="rect">
             <a:avLst/>
@@ -2187,7 +2187,7 @@
                 <a:latin typeface="Segoe UI"/>
                 <a:cs typeface="Segoe UI"/>
               </a:rPr>
-              <a:t xml:space="preserve">The ratio of 9th-graders to 10th-graders is 1 : 1. What is the slope of this relationship?</a:t>
+              <a:t xml:space="preserve">Function p passes through (0, 1) and (4, 4). Which function has a greater rate of change than function p?</a:t>
             </a:r>
             <a:endParaRPr lang="en-US" sz="1800" dirty="0"/>
           </a:p>
@@ -2202,7 +2202,7 @@
         <p:spPr>
           <a:xfrm>
             <a:off x="7177857" y="3006090"/>
-            <a:ext cx="4328038" cy="1298448"/>
+            <a:ext cx="4328038" cy="1847088"/>
           </a:xfrm>
           <a:prstGeom prst="rect">
             <a:avLst/>
@@ -2231,7 +2231,7 @@
                 <a:latin typeface="Segoe UI"/>
                 <a:cs typeface="Segoe UI"/>
               </a:rPr>
-              <a:t xml:space="preserve">1</a:t>
+              <a:t xml:space="preserve">y = x − 2</a:t>
             </a:r>
             <a:br>
               <a:rPr lang="en-US" sz="1800" dirty="0">
@@ -2250,7 +2250,7 @@
                 <a:latin typeface="Segoe UI"/>
                 <a:cs typeface="Segoe UI"/>
               </a:rPr>
-              <a:t xml:space="preserve">1. 1 : 1 means 1 tenth-grader for every 1 ninth-grader. 2. 1 ÷ 1 = 1, so y = x and the slope is 1.</a:t>
+              <a:t xml:space="preserve">1. Slope of p: (4 − 1) ÷ (4 − 0) = 3/4 = 0.75. 2. Compare each slope with 0.75: 1, 0.5, 0.75 (3x − 4y = 8 is y = ¾x − 2), 0.7. 3. Only 1 is greater: y = x − 2.</a:t>
             </a:r>
             <a:endParaRPr lang="en-US" sz="1800" dirty="0"/>
           </a:p>
@@ -2264,7 +2264,7 @@
         </p:nvCxnSpPr>
         <p:spPr>
           <a:xfrm>
-            <a:off x="685800" y="4304538"/>
+            <a:off x="685800" y="4853178"/>
             <a:ext cx="10820095" cy="0"/>
           </a:xfrm>
           <a:prstGeom prst="line">
@@ -3438,7 +3438,7 @@
         <p:spPr>
           <a:xfrm>
             <a:off x="685800" y="3006090"/>
-            <a:ext cx="2164019" cy="1298448"/>
+            <a:ext cx="2164019" cy="1847088"/>
           </a:xfrm>
           <a:prstGeom prst="rect">
             <a:avLst/>
@@ -3477,7 +3477,7 @@
                 <a:latin typeface="Segoe UI"/>
                 <a:cs typeface="Segoe UI"/>
               </a:rPr>
-              <a:t xml:space="preserve"> · SE p. 324</a:t>
+              <a:t xml:space="preserve"> · SE p. 325</a:t>
             </a:r>
             <a:endParaRPr lang="en-US" sz="1800" dirty="0"/>
           </a:p>
@@ -3492,7 +3492,7 @@
         <p:spPr>
           <a:xfrm>
             <a:off x="2849819" y="3006090"/>
-            <a:ext cx="4328038" cy="1298448"/>
+            <a:ext cx="4328038" cy="1847088"/>
           </a:xfrm>
           <a:prstGeom prst="rect">
             <a:avLst/>
@@ -3521,7 +3521,7 @@
                 <a:latin typeface="Segoe UI"/>
                 <a:cs typeface="Segoe UI"/>
               </a:rPr>
-              <a:t xml:space="preserve">Miguel started with $0 and had $80 after 4 months. How much did he save each month?</a:t>
+              <a:t xml:space="preserve">A 200-gallon tank drains 10 gallons each minute: w(t) = 200 − 10t. What is the range of the function for this situation?</a:t>
             </a:r>
             <a:endParaRPr lang="en-US" sz="1800" dirty="0"/>
           </a:p>
@@ -3536,7 +3536,7 @@
         <p:spPr>
           <a:xfrm>
             <a:off x="7177857" y="3006090"/>
-            <a:ext cx="4328038" cy="1298448"/>
+            <a:ext cx="4328038" cy="1847088"/>
           </a:xfrm>
           <a:prstGeom prst="rect">
             <a:avLst/>
@@ -3565,7 +3565,7 @@
                 <a:latin typeface="Segoe UI"/>
                 <a:cs typeface="Segoe UI"/>
               </a:rPr>
-              <a:t xml:space="preserve">$20</a:t>
+              <a:t xml:space="preserve">0 ≤ w(t) ≤ 200</a:t>
             </a:r>
             <a:br>
               <a:rPr lang="en-US" sz="1800" dirty="0">
@@ -3584,7 +3584,7 @@
                 <a:latin typeface="Segoe UI"/>
                 <a:cs typeface="Segoe UI"/>
               </a:rPr>
-              <a:t xml:space="preserve">1. Change in money: 80 − 0 = 80 dollars. 2. Change in time: 4 months. 3. 80 ÷ 4 = 20, so $20 per month.</a:t>
+              <a:t xml:space="preserve">1. The output is w(t), the gallons left. 2. Most: 200 gallons at the start. Least: 0 gallons, when 200 − 10t = 0 at t = 20. 3. Range: 0 ≤ w(t) ≤ 200.</a:t>
             </a:r>
             <a:endParaRPr lang="en-US" sz="1800" dirty="0"/>
           </a:p>
@@ -3598,7 +3598,7 @@
         </p:nvCxnSpPr>
         <p:spPr>
           <a:xfrm>
-            <a:off x="685800" y="4304538"/>
+            <a:off x="685800" y="4853178"/>
             <a:ext cx="10820095" cy="0"/>
           </a:xfrm>
           <a:prstGeom prst="line">
